--- a/Project/CRMRetention/Result/마케팅 도메인지식 인포그래픽.pptx
+++ b/Project/CRMRetention/Result/마케팅 도메인지식 인포그래픽.pptx
@@ -247,7 +247,7 @@
           <a:p>
             <a:fld id="{126D16F6-A6DC-4F14-98B6-E9C0BF3DA88A}" type="datetimeFigureOut">
               <a:rPr lang="ko-KR" altLang="en-US" smtClean="0"/>
-              <a:t>2026-08-19</a:t>
+              <a:t>2026-08-20</a:t>
             </a:fld>
             <a:endParaRPr lang="ko-KR" altLang="en-US"/>
           </a:p>
@@ -417,7 +417,7 @@
           <a:p>
             <a:fld id="{126D16F6-A6DC-4F14-98B6-E9C0BF3DA88A}" type="datetimeFigureOut">
               <a:rPr lang="ko-KR" altLang="en-US" smtClean="0"/>
-              <a:t>2026-08-19</a:t>
+              <a:t>2026-08-20</a:t>
             </a:fld>
             <a:endParaRPr lang="ko-KR" altLang="en-US"/>
           </a:p>
@@ -597,7 +597,7 @@
           <a:p>
             <a:fld id="{126D16F6-A6DC-4F14-98B6-E9C0BF3DA88A}" type="datetimeFigureOut">
               <a:rPr lang="ko-KR" altLang="en-US" smtClean="0"/>
-              <a:t>2026-08-19</a:t>
+              <a:t>2026-08-20</a:t>
             </a:fld>
             <a:endParaRPr lang="ko-KR" altLang="en-US"/>
           </a:p>
@@ -767,7 +767,7 @@
           <a:p>
             <a:fld id="{126D16F6-A6DC-4F14-98B6-E9C0BF3DA88A}" type="datetimeFigureOut">
               <a:rPr lang="ko-KR" altLang="en-US" smtClean="0"/>
-              <a:t>2026-08-19</a:t>
+              <a:t>2026-08-20</a:t>
             </a:fld>
             <a:endParaRPr lang="ko-KR" altLang="en-US"/>
           </a:p>
@@ -1013,7 +1013,7 @@
           <a:p>
             <a:fld id="{126D16F6-A6DC-4F14-98B6-E9C0BF3DA88A}" type="datetimeFigureOut">
               <a:rPr lang="ko-KR" altLang="en-US" smtClean="0"/>
-              <a:t>2026-08-19</a:t>
+              <a:t>2026-08-20</a:t>
             </a:fld>
             <a:endParaRPr lang="ko-KR" altLang="en-US"/>
           </a:p>
@@ -1245,7 +1245,7 @@
           <a:p>
             <a:fld id="{126D16F6-A6DC-4F14-98B6-E9C0BF3DA88A}" type="datetimeFigureOut">
               <a:rPr lang="ko-KR" altLang="en-US" smtClean="0"/>
-              <a:t>2026-08-19</a:t>
+              <a:t>2026-08-20</a:t>
             </a:fld>
             <a:endParaRPr lang="ko-KR" altLang="en-US"/>
           </a:p>
@@ -1612,7 +1612,7 @@
           <a:p>
             <a:fld id="{126D16F6-A6DC-4F14-98B6-E9C0BF3DA88A}" type="datetimeFigureOut">
               <a:rPr lang="ko-KR" altLang="en-US" smtClean="0"/>
-              <a:t>2026-08-19</a:t>
+              <a:t>2026-08-20</a:t>
             </a:fld>
             <a:endParaRPr lang="ko-KR" altLang="en-US"/>
           </a:p>
@@ -1730,7 +1730,7 @@
           <a:p>
             <a:fld id="{126D16F6-A6DC-4F14-98B6-E9C0BF3DA88A}" type="datetimeFigureOut">
               <a:rPr lang="ko-KR" altLang="en-US" smtClean="0"/>
-              <a:t>2026-08-19</a:t>
+              <a:t>2026-08-20</a:t>
             </a:fld>
             <a:endParaRPr lang="ko-KR" altLang="en-US"/>
           </a:p>
@@ -1825,7 +1825,7 @@
           <a:p>
             <a:fld id="{126D16F6-A6DC-4F14-98B6-E9C0BF3DA88A}" type="datetimeFigureOut">
               <a:rPr lang="ko-KR" altLang="en-US" smtClean="0"/>
-              <a:t>2026-08-19</a:t>
+              <a:t>2026-08-20</a:t>
             </a:fld>
             <a:endParaRPr lang="ko-KR" altLang="en-US"/>
           </a:p>
@@ -2102,7 +2102,7 @@
           <a:p>
             <a:fld id="{126D16F6-A6DC-4F14-98B6-E9C0BF3DA88A}" type="datetimeFigureOut">
               <a:rPr lang="ko-KR" altLang="en-US" smtClean="0"/>
-              <a:t>2026-08-19</a:t>
+              <a:t>2026-08-20</a:t>
             </a:fld>
             <a:endParaRPr lang="ko-KR" altLang="en-US"/>
           </a:p>
@@ -2359,7 +2359,7 @@
           <a:p>
             <a:fld id="{126D16F6-A6DC-4F14-98B6-E9C0BF3DA88A}" type="datetimeFigureOut">
               <a:rPr lang="ko-KR" altLang="en-US" smtClean="0"/>
-              <a:t>2026-08-19</a:t>
+              <a:t>2026-08-20</a:t>
             </a:fld>
             <a:endParaRPr lang="ko-KR" altLang="en-US"/>
           </a:p>
@@ -2572,7 +2572,7 @@
           <a:p>
             <a:fld id="{126D16F6-A6DC-4F14-98B6-E9C0BF3DA88A}" type="datetimeFigureOut">
               <a:rPr lang="ko-KR" altLang="en-US" smtClean="0"/>
-              <a:t>2026-08-19</a:t>
+              <a:t>2026-08-20</a:t>
             </a:fld>
             <a:endParaRPr lang="ko-KR" altLang="en-US"/>
           </a:p>
@@ -5667,7 +5667,7 @@
           <a:p>
             <a:pPr algn="ctr"/>
             <a:r>
-              <a:rPr lang="en-US" altLang="ko-KR" sz="800" b="1">
+              <a:rPr lang="en-US" altLang="ko-KR" sz="800" b="1" dirty="0">
                 <a:solidFill>
                   <a:schemeClr val="tx1"/>
                 </a:solidFill>
@@ -5675,7 +5675,7 @@
               <a:t>9</a:t>
             </a:r>
             <a:r>
-              <a:rPr lang="ko-KR" altLang="en-US" sz="800" b="1">
+              <a:rPr lang="ko-KR" altLang="en-US" sz="800" b="1" dirty="0">
                 <a:solidFill>
                   <a:schemeClr val="tx1"/>
                 </a:solidFill>
@@ -5696,34 +5696,18 @@
                   <a:schemeClr val="tx1"/>
                 </a:solidFill>
               </a:rPr>
-              <a:t>RF,</a:t>
-            </a:r>
-            <a:r>
-              <a:rPr lang="en-US" altLang="ko-KR" sz="800">
-                <a:solidFill>
-                  <a:schemeClr val="tx1"/>
-                </a:solidFill>
-              </a:rPr>
-              <a:t>XGB,</a:t>
+              <a:t>RF,XGB,</a:t>
             </a:r>
           </a:p>
           <a:p>
             <a:pPr algn="ctr"/>
             <a:r>
-              <a:rPr lang="en-US" altLang="ko-KR" sz="800">
-                <a:solidFill>
-                  <a:schemeClr val="tx1"/>
-                </a:solidFill>
-              </a:rPr>
-              <a:t>MLP, RNN</a:t>
-            </a:r>
-            <a:r>
               <a:rPr lang="en-US" altLang="ko-KR" sz="800" dirty="0">
                 <a:solidFill>
                   <a:schemeClr val="tx1"/>
                 </a:solidFill>
               </a:rPr>
-              <a:t>, CNN, LSTM,</a:t>
+              <a:t>MLP, RNN, CNN, LSTM,</a:t>
             </a:r>
           </a:p>
           <a:p>
@@ -5734,32 +5718,19 @@
                   <a:schemeClr val="tx1"/>
                 </a:solidFill>
               </a:rPr>
-              <a:t>RNN-LSTM</a:t>
-            </a:r>
-            <a:r>
-              <a:rPr lang="en-US" altLang="ko-KR" sz="800">
-                <a:solidFill>
-                  <a:schemeClr val="tx1"/>
-                </a:solidFill>
-              </a:rPr>
-              <a:t>, CNN-LSTM,</a:t>
+              <a:t>RNN-LSTM, CNN-LSTM,</a:t>
             </a:r>
           </a:p>
           <a:p>
             <a:pPr algn="ctr"/>
             <a:r>
-              <a:rPr lang="en-US" altLang="ko-KR" sz="800">
+              <a:rPr lang="en-US" altLang="ko-KR" sz="800" dirty="0">
                 <a:solidFill>
                   <a:schemeClr val="tx1"/>
                 </a:solidFill>
               </a:rPr>
               <a:t>TabNet</a:t>
             </a:r>
-            <a:endParaRPr lang="en-US" altLang="ko-KR" sz="800" dirty="0">
-              <a:solidFill>
-                <a:schemeClr val="tx1"/>
-              </a:solidFill>
-            </a:endParaRPr>
           </a:p>
         </p:txBody>
       </p:sp>
@@ -6044,7 +6015,7 @@
         </p:nvSpPr>
         <p:spPr>
           <a:xfrm>
-            <a:off x="6657928" y="459023"/>
+            <a:off x="6657928" y="516173"/>
             <a:ext cx="2476186" cy="306109"/>
           </a:xfrm>
           <a:prstGeom prst="rect">
@@ -6161,7 +6132,7 @@
               </a:spcBef>
             </a:pPr>
             <a:r>
-              <a:rPr lang="en-US" altLang="ko-KR" sz="700" b="1">
+              <a:rPr lang="en-US" altLang="ko-KR" sz="700" b="1" dirty="0">
                 <a:solidFill>
                   <a:srgbClr val="000000"/>
                 </a:solidFill>
